--- a/docs/battery_tool_update.pptx
+++ b/docs/battery_tool_update.pptx
@@ -12,9 +12,10 @@
     <p:sldId id="260" r:id="rId6"/>
     <p:sldId id="261" r:id="rId7"/>
     <p:sldId id="262" r:id="rId8"/>
+    <p:sldId id="263" r:id="rId9"/>
   </p:sldIdLst>
   <p:notesMasterIdLst>
-    <p:notesMasterId r:id="rId9"/>
+    <p:notesMasterId r:id="rId10"/>
   </p:notesMasterIdLst>
   <p:sldSz cx="9144000" cy="5143500"/>
   <p:notesSz cx="5143500" cy="9144000"/>
@@ -1078,6 +1079,94 @@
 </p:notes>
 </file>
 
+<file path=ppt/notesSlides/notesSlide8.xml><?xml version="1.0" encoding="utf-8"?>
+<p:notes xmlns:a="http://schemas.openxmlformats.org/drawingml/2006/main" xmlns:r="http://schemas.openxmlformats.org/officeDocument/2006/relationships" xmlns:p="http://schemas.openxmlformats.org/presentationml/2006/main">
+  <p:cSld>
+    <p:spTree>
+      <p:nvGrpSpPr>
+        <p:cNvPr id="1" name=""/>
+        <p:cNvGrpSpPr/>
+        <p:nvPr/>
+      </p:nvGrpSpPr>
+      <p:grpSpPr>
+        <a:xfrm>
+          <a:off x="0" y="0"/>
+          <a:ext cx="0" cy="0"/>
+          <a:chOff x="0" y="0"/>
+          <a:chExt cx="0" cy="0"/>
+        </a:xfrm>
+      </p:grpSpPr>
+      <p:sp>
+        <p:nvSpPr>
+          <p:cNvPr id="2" name="Slide Image Placeholder 1"/>
+          <p:cNvSpPr>
+            <a:spLocks noGrp="1" noRot="1" noChangeAspect="1"/>
+          </p:cNvSpPr>
+          <p:nvPr>
+            <p:ph type="sldImg"/>
+          </p:nvPr>
+        </p:nvSpPr>
+        <p:spPr/>
+      </p:sp>
+      <p:sp>
+        <p:nvSpPr>
+          <p:cNvPr id="3" name="Notes Placeholder 2"/>
+          <p:cNvSpPr>
+            <a:spLocks noGrp="1"/>
+          </p:cNvSpPr>
+          <p:nvPr>
+            <p:ph type="body" idx="1"/>
+          </p:nvPr>
+        </p:nvSpPr>
+        <p:spPr/>
+        <p:txBody>
+          <a:bodyPr/>
+          <a:lstStyle/>
+          <a:p>
+            <a:r>
+              <a:rPr lang="en-US" dirty="0"/>
+              <a:t/>
+            </a:r>
+            <a:endParaRPr lang="en-US" dirty="0"/>
+          </a:p>
+        </p:txBody>
+      </p:sp>
+      <p:sp>
+        <p:nvSpPr>
+          <p:cNvPr id="4" name="Slide Number Placeholder 3"/>
+          <p:cNvSpPr>
+            <a:spLocks noGrp="1"/>
+          </p:cNvSpPr>
+          <p:nvPr>
+            <p:ph type="sldNum" sz="quarter" idx="10"/>
+          </p:nvPr>
+        </p:nvSpPr>
+        <p:spPr/>
+        <p:txBody>
+          <a:bodyPr/>
+          <a:lstStyle/>
+          <a:p>
+            <a:fld id="{F7021451-1387-4CA6-816F-3879F97B5CBC}" type="slidenum">
+              <a:rPr lang="en-US"/>
+              <a:t>8</a:t>
+            </a:fld>
+            <a:endParaRPr lang="en-US"/>
+          </a:p>
+        </p:txBody>
+      </p:sp>
+    </p:spTree>
+    <p:extLst>
+      <p:ext uri="{BB962C8B-B14F-4D97-AF65-F5344CB8AC3E}">
+        <p14:creationId xmlns:p14="http://schemas.microsoft.com/office/powerpoint/2010/main" val="1024086991"/>
+      </p:ext>
+    </p:extLst>
+  </p:cSld>
+  <p:clrMapOvr>
+    <a:masterClrMapping/>
+  </p:clrMapOvr>
+</p:notes>
+</file>
+
 <file path=ppt/slideLayouts/slideLayout1.xml><?xml version="1.0" encoding="utf-8"?>
 <p:sldLayout xmlns:a="http://schemas.openxmlformats.org/drawingml/2006/main" xmlns:r="http://schemas.openxmlformats.org/officeDocument/2006/relationships" xmlns:p="http://schemas.openxmlformats.org/presentationml/2006/main" preserve="1">
   <p:cSld name="DEFAULT">
@@ -5122,7 +5211,7 @@
                 <a:ea typeface="Arial Black" pitchFamily="34" charset="-122"/>
                 <a:cs typeface="Arial Black" pitchFamily="34" charset="-120"/>
               </a:rPr>
-              <a:t>P2D 모델 기반 전기화학 시뮬레이션</a:t>
+              <a:t>P2D 모델 — 구조와 지배방정식</a:t>
             </a:r>
             <a:endParaRPr lang="en-US" sz="2400" dirty="0"/>
           </a:p>
@@ -5136,8 +5225,8 @@
         </p:nvSpPr>
         <p:spPr>
           <a:xfrm>
-            <a:off x="731520" y="1005840"/>
-            <a:ext cx="3840480" cy="1463040"/>
+            <a:off x="731520" y="914400"/>
+            <a:ext cx="3840480" cy="1417320"/>
           </a:xfrm>
           <a:prstGeom prst="rect">
             <a:avLst/>
@@ -5163,8 +5252,8 @@
         </p:nvSpPr>
         <p:spPr>
           <a:xfrm>
-            <a:off x="731520" y="1005840"/>
-            <a:ext cx="54864" cy="1463040"/>
+            <a:off x="731520" y="914400"/>
+            <a:ext cx="54864" cy="1417320"/>
           </a:xfrm>
           <a:prstGeom prst="rect">
             <a:avLst/>
@@ -5183,7 +5272,7 @@
         </p:nvSpPr>
         <p:spPr>
           <a:xfrm>
-            <a:off x="1005840" y="1143000"/>
+            <a:off x="1005840" y="1024128"/>
             <a:ext cx="457200" cy="457200"/>
           </a:xfrm>
           <a:prstGeom prst="ellipse">
@@ -5211,7 +5300,7 @@
         </p:blipFill>
         <p:spPr>
           <a:xfrm>
-            <a:off x="1069848" y="1207008"/>
+            <a:off x="1069848" y="1088136"/>
             <a:ext cx="329184" cy="329184"/>
           </a:xfrm>
           <a:prstGeom prst="rect">
@@ -5227,8 +5316,8 @@
         </p:nvSpPr>
         <p:spPr>
           <a:xfrm>
-            <a:off x="1645920" y="1143000"/>
-            <a:ext cx="2743200" cy="365760"/>
+            <a:off x="1645920" y="1024128"/>
+            <a:ext cx="2743200" cy="347472"/>
           </a:xfrm>
           <a:prstGeom prst="rect">
             <a:avLst/>
@@ -5244,7 +5333,7 @@
               <a:buNone/>
             </a:pPr>
             <a:r>
-              <a:rPr lang="en-US" sz="1700" b="1" dirty="0">
+              <a:rPr lang="en-US" sz="1600" b="1" dirty="0">
                 <a:solidFill>
                   <a:srgbClr val="0D1B2A"/>
                 </a:solidFill>
@@ -5252,9 +5341,9 @@
                 <a:ea typeface="Arial Black" pitchFamily="34" charset="-122"/>
                 <a:cs typeface="Arial Black" pitchFamily="34" charset="-120"/>
               </a:rPr>
-              <a:t>P2D 모델이란?</a:t>
-            </a:r>
-            <a:endParaRPr lang="en-US" sz="1700" dirty="0"/>
+              <a:t>P2D (Pseudo 2D) 모델</a:t>
+            </a:r>
+            <a:endParaRPr lang="en-US" sz="1600" dirty="0"/>
           </a:p>
         </p:txBody>
       </p:sp>
@@ -5266,21 +5355,22 @@
         </p:nvSpPr>
         <p:spPr>
           <a:xfrm>
-            <a:off x="1005840" y="1600200"/>
-            <a:ext cx="3291840" cy="777240"/>
-          </a:xfrm>
-          <a:prstGeom prst="rect">
-            <a:avLst/>
-          </a:prstGeom>
-          <a:noFill/>
-          <a:ln/>
-        </p:spPr>
-        <p:txBody>
-          <a:bodyPr wrap="square" lIns="0" tIns="0" rIns="0" bIns="0" rtlCol="0" anchor="ctr"/>
-          <a:lstStyle/>
-          <a:p>
-            <a:pPr indent="0" marL="0">
-              <a:buNone/>
+            <a:off x="1005840" y="1463040"/>
+            <a:ext cx="3383280" cy="777240"/>
+          </a:xfrm>
+          <a:prstGeom prst="rect">
+            <a:avLst/>
+          </a:prstGeom>
+          <a:noFill/>
+          <a:ln/>
+        </p:spPr>
+        <p:txBody>
+          <a:bodyPr wrap="square" lIns="0" tIns="0" rIns="0" bIns="0" rtlCol="0" anchor="ctr"/>
+          <a:lstStyle/>
+          <a:p>
+            <a:pPr marL="342900" indent="-342900">
+              <a:buSzPct val="100000"/>
+              <a:buChar char="•"/>
             </a:pPr>
             <a:r>
               <a:rPr lang="en-US" sz="1200" dirty="0">
@@ -5291,13 +5381,14 @@
                 <a:ea typeface="Calibri" pitchFamily="34" charset="-122"/>
                 <a:cs typeface="Calibri" pitchFamily="34" charset="-120"/>
               </a:rPr>
-              <a:t>Pseudo Two-Dimensional 모델로,</a:t>
+              <a:t>셀 두께 방향 1D (음극→분리막→양극)</a:t>
             </a:r>
             <a:endParaRPr lang="en-US" sz="1200" dirty="0"/>
           </a:p>
           <a:p>
-            <a:pPr indent="0" marL="0">
-              <a:buNone/>
+            <a:pPr marL="342900" indent="-342900">
+              <a:buSzPct val="100000"/>
+              <a:buChar char="•"/>
             </a:pPr>
             <a:r>
               <a:rPr lang="en-US" sz="1200" dirty="0">
@@ -5308,13 +5399,14 @@
                 <a:ea typeface="Calibri" pitchFamily="34" charset="-122"/>
                 <a:cs typeface="Calibri" pitchFamily="34" charset="-120"/>
               </a:rPr>
-              <a:t>리튬이온 배터리의 전기화학적 거동을</a:t>
+              <a:t>활물질 입자 내부 반경 방향 1D (고상 확산)</a:t>
             </a:r>
             <a:endParaRPr lang="en-US" sz="1200" dirty="0"/>
           </a:p>
           <a:p>
-            <a:pPr indent="0" marL="0">
-              <a:buNone/>
+            <a:pPr marL="342900" indent="-342900">
+              <a:buSzPct val="100000"/>
+              <a:buChar char="•"/>
             </a:pPr>
             <a:r>
               <a:rPr lang="en-US" sz="1200" dirty="0">
@@ -5325,7 +5417,7 @@
                 <a:ea typeface="Calibri" pitchFamily="34" charset="-122"/>
                 <a:cs typeface="Calibri" pitchFamily="34" charset="-120"/>
               </a:rPr>
-              <a:t>물리 기반으로 시뮬레이션합니다.</a:t>
+              <a:t>두 스케일을 결합하여 전기화학 거동 모사</a:t>
             </a:r>
             <a:endParaRPr lang="en-US" sz="1200" dirty="0"/>
           </a:p>
@@ -5339,8 +5431,8 @@
         </p:nvSpPr>
         <p:spPr>
           <a:xfrm>
-            <a:off x="731520" y="2697480"/>
-            <a:ext cx="3840480" cy="1463040"/>
+            <a:off x="731520" y="2560320"/>
+            <a:ext cx="3840480" cy="2011680"/>
           </a:xfrm>
           <a:prstGeom prst="rect">
             <a:avLst/>
@@ -5366,14 +5458,14 @@
         </p:nvSpPr>
         <p:spPr>
           <a:xfrm>
-            <a:off x="731520" y="2697480"/>
-            <a:ext cx="54864" cy="1463040"/>
-          </a:xfrm>
-          <a:prstGeom prst="rect">
-            <a:avLst/>
-          </a:prstGeom>
-          <a:solidFill>
-            <a:srgbClr val="F59E0B"/>
+            <a:off x="731520" y="2560320"/>
+            <a:ext cx="54864" cy="2011680"/>
+          </a:xfrm>
+          <a:prstGeom prst="rect">
+            <a:avLst/>
+          </a:prstGeom>
+          <a:solidFill>
+            <a:srgbClr val="0D9488"/>
           </a:solidFill>
           <a:ln/>
         </p:spPr>
@@ -5386,14 +5478,14 @@
         </p:nvSpPr>
         <p:spPr>
           <a:xfrm>
-            <a:off x="1005840" y="2834640"/>
+            <a:off x="1005840" y="2670048"/>
             <a:ext cx="457200" cy="457200"/>
           </a:xfrm>
           <a:prstGeom prst="ellipse">
             <a:avLst/>
           </a:prstGeom>
           <a:solidFill>
-            <a:srgbClr val="F59E0B"/>
+            <a:srgbClr val="0D9488"/>
           </a:solidFill>
           <a:ln/>
         </p:spPr>
@@ -5414,7 +5506,7 @@
         </p:blipFill>
         <p:spPr>
           <a:xfrm>
-            <a:off x="1069848" y="2898648"/>
+            <a:off x="1069848" y="2734056"/>
             <a:ext cx="329184" cy="329184"/>
           </a:xfrm>
           <a:prstGeom prst="rect">
@@ -5430,8 +5522,8 @@
         </p:nvSpPr>
         <p:spPr>
           <a:xfrm>
-            <a:off x="1645920" y="2834640"/>
-            <a:ext cx="2743200" cy="365760"/>
+            <a:off x="1645920" y="2670048"/>
+            <a:ext cx="2743200" cy="347472"/>
           </a:xfrm>
           <a:prstGeom prst="rect">
             <a:avLst/>
@@ -5447,7 +5539,7 @@
               <a:buNone/>
             </a:pPr>
             <a:r>
-              <a:rPr lang="en-US" sz="1700" b="1" dirty="0">
+              <a:rPr lang="en-US" sz="1600" b="1" dirty="0">
                 <a:solidFill>
                   <a:srgbClr val="0D1B2A"/>
                 </a:solidFill>
@@ -5455,9 +5547,9 @@
                 <a:ea typeface="Arial Black" pitchFamily="34" charset="-122"/>
                 <a:cs typeface="Arial Black" pitchFamily="34" charset="-120"/>
               </a:rPr>
-              <a:t>현재 상태: 프로토 버전</a:t>
-            </a:r>
-            <a:endParaRPr lang="en-US" sz="1700" dirty="0"/>
+              <a:t>핵심 지배방정식</a:t>
+            </a:r>
+            <a:endParaRPr lang="en-US" sz="1600" dirty="0"/>
           </a:p>
         </p:txBody>
       </p:sp>
@@ -5469,43 +5561,63 @@
         </p:nvSpPr>
         <p:spPr>
           <a:xfrm>
-            <a:off x="1005840" y="3291840"/>
-            <a:ext cx="3291840" cy="777240"/>
-          </a:xfrm>
-          <a:prstGeom prst="rect">
-            <a:avLst/>
-          </a:prstGeom>
-          <a:noFill/>
-          <a:ln/>
-        </p:spPr>
-        <p:txBody>
-          <a:bodyPr wrap="square" lIns="0" tIns="0" rIns="0" bIns="0" rtlCol="0" anchor="ctr"/>
-          <a:lstStyle/>
-          <a:p>
-            <a:pPr marL="342900" indent="-342900">
-              <a:buSzPct val="100000"/>
-              <a:buChar char="•"/>
-            </a:pPr>
-            <a:r>
-              <a:rPr lang="en-US" sz="1200" dirty="0">
-                <a:solidFill>
-                  <a:srgbClr val="475569"/>
+            <a:off x="1005840" y="3154680"/>
+            <a:ext cx="1554480" cy="292608"/>
+          </a:xfrm>
+          <a:prstGeom prst="rect">
+            <a:avLst/>
+          </a:prstGeom>
+          <a:noFill/>
+          <a:ln/>
+        </p:spPr>
+        <p:txBody>
+          <a:bodyPr wrap="square" lIns="0" tIns="0" rIns="0" bIns="0" rtlCol="0" anchor="ctr"/>
+          <a:lstStyle/>
+          <a:p>
+            <a:pPr indent="0" marL="0">
+              <a:buNone/>
+            </a:pPr>
+            <a:r>
+              <a:rPr lang="en-US" sz="1100" b="1" dirty="0">
+                <a:solidFill>
+                  <a:srgbClr val="0D9488"/>
                 </a:solidFill>
                 <a:latin typeface="Calibri" pitchFamily="34" charset="0"/>
                 <a:ea typeface="Calibri" pitchFamily="34" charset="-122"/>
                 <a:cs typeface="Calibri" pitchFamily="34" charset="-120"/>
               </a:rPr>
-              <a:t>문헌값 기반 파라미터로 구성</a:t>
-            </a:r>
-            <a:endParaRPr lang="en-US" sz="1200" dirty="0"/>
-          </a:p>
-          <a:p>
-            <a:pPr marL="342900" indent="-342900">
-              <a:buSzPct val="100000"/>
-              <a:buChar char="•"/>
-            </a:pPr>
-            <a:r>
-              <a:rPr lang="en-US" sz="1200" dirty="0">
+              <a:t>전해질 Li⁺ 수송</a:t>
+            </a:r>
+            <a:endParaRPr lang="en-US" sz="1100" dirty="0"/>
+          </a:p>
+        </p:txBody>
+      </p:sp>
+      <p:sp>
+        <p:nvSpPr>
+          <p:cNvPr id="18" name="Text 14"/>
+          <p:cNvSpPr/>
+          <p:nvPr/>
+        </p:nvSpPr>
+        <p:spPr>
+          <a:xfrm>
+            <a:off x="2606040" y="3154680"/>
+            <a:ext cx="1828800" cy="292608"/>
+          </a:xfrm>
+          <a:prstGeom prst="rect">
+            <a:avLst/>
+          </a:prstGeom>
+          <a:noFill/>
+          <a:ln/>
+        </p:spPr>
+        <p:txBody>
+          <a:bodyPr wrap="square" lIns="0" tIns="0" rIns="0" bIns="0" rtlCol="0" anchor="ctr"/>
+          <a:lstStyle/>
+          <a:p>
+            <a:pPr indent="0" marL="0">
+              <a:buNone/>
+            </a:pPr>
+            <a:r>
+              <a:rPr lang="en-US" sz="1100" dirty="0">
                 <a:solidFill>
                   <a:srgbClr val="475569"/>
                 </a:solidFill>
@@ -5513,40 +5625,256 @@
                 <a:ea typeface="Calibri" pitchFamily="34" charset="-122"/>
                 <a:cs typeface="Calibri" pitchFamily="34" charset="-120"/>
               </a:rPr>
-              <a:t>그룹 자체 물성 데이터는 확보 중</a:t>
-            </a:r>
-            <a:endParaRPr lang="en-US" sz="1200" dirty="0"/>
-          </a:p>
-          <a:p>
-            <a:pPr marL="342900" indent="-342900">
-              <a:buSzPct val="100000"/>
-              <a:buChar char="•"/>
-            </a:pPr>
-            <a:r>
-              <a:rPr lang="en-US" sz="1200" dirty="0">
-                <a:solidFill>
-                  <a:srgbClr val="475569"/>
+              <a:t>농도·전위 분포 (확산 + 이동)</a:t>
+            </a:r>
+            <a:endParaRPr lang="en-US" sz="1100" dirty="0"/>
+          </a:p>
+        </p:txBody>
+      </p:sp>
+      <p:sp>
+        <p:nvSpPr>
+          <p:cNvPr id="19" name="Text 15"/>
+          <p:cNvSpPr/>
+          <p:nvPr/>
+        </p:nvSpPr>
+        <p:spPr>
+          <a:xfrm>
+            <a:off x="1005840" y="3483864"/>
+            <a:ext cx="1554480" cy="292608"/>
+          </a:xfrm>
+          <a:prstGeom prst="rect">
+            <a:avLst/>
+          </a:prstGeom>
+          <a:noFill/>
+          <a:ln/>
+        </p:spPr>
+        <p:txBody>
+          <a:bodyPr wrap="square" lIns="0" tIns="0" rIns="0" bIns="0" rtlCol="0" anchor="ctr"/>
+          <a:lstStyle/>
+          <a:p>
+            <a:pPr indent="0" marL="0">
+              <a:buNone/>
+            </a:pPr>
+            <a:r>
+              <a:rPr lang="en-US" sz="1100" b="1" dirty="0">
+                <a:solidFill>
+                  <a:srgbClr val="0D9488"/>
                 </a:solidFill>
                 <a:latin typeface="Calibri" pitchFamily="34" charset="0"/>
                 <a:ea typeface="Calibri" pitchFamily="34" charset="-122"/>
                 <a:cs typeface="Calibri" pitchFamily="34" charset="-120"/>
               </a:rPr>
-              <a:t>자체 물성 확보 시 정확도 향상 기대</a:t>
-            </a:r>
-            <a:endParaRPr lang="en-US" sz="1200" dirty="0"/>
-          </a:p>
-        </p:txBody>
-      </p:sp>
-      <p:sp>
-        <p:nvSpPr>
-          <p:cNvPr id="18" name="Shape 14"/>
-          <p:cNvSpPr/>
-          <p:nvPr/>
-        </p:nvSpPr>
-        <p:spPr>
-          <a:xfrm>
-            <a:off x="4846320" y="1005840"/>
-            <a:ext cx="3749040" cy="3154680"/>
+              <a:t>고상 확산</a:t>
+            </a:r>
+            <a:endParaRPr lang="en-US" sz="1100" dirty="0"/>
+          </a:p>
+        </p:txBody>
+      </p:sp>
+      <p:sp>
+        <p:nvSpPr>
+          <p:cNvPr id="20" name="Text 16"/>
+          <p:cNvSpPr/>
+          <p:nvPr/>
+        </p:nvSpPr>
+        <p:spPr>
+          <a:xfrm>
+            <a:off x="2606040" y="3483864"/>
+            <a:ext cx="1828800" cy="292608"/>
+          </a:xfrm>
+          <a:prstGeom prst="rect">
+            <a:avLst/>
+          </a:prstGeom>
+          <a:noFill/>
+          <a:ln/>
+        </p:spPr>
+        <p:txBody>
+          <a:bodyPr wrap="square" lIns="0" tIns="0" rIns="0" bIns="0" rtlCol="0" anchor="ctr"/>
+          <a:lstStyle/>
+          <a:p>
+            <a:pPr indent="0" marL="0">
+              <a:buNone/>
+            </a:pPr>
+            <a:r>
+              <a:rPr lang="en-US" sz="1100" dirty="0">
+                <a:solidFill>
+                  <a:srgbClr val="475569"/>
+                </a:solidFill>
+                <a:latin typeface="Calibri" pitchFamily="34" charset="0"/>
+                <a:ea typeface="Calibri" pitchFamily="34" charset="-122"/>
+                <a:cs typeface="Calibri" pitchFamily="34" charset="-120"/>
+              </a:rPr>
+              <a:t>입자 내 Li 농도 (Fick's law, 구좌표)</a:t>
+            </a:r>
+            <a:endParaRPr lang="en-US" sz="1100" dirty="0"/>
+          </a:p>
+        </p:txBody>
+      </p:sp>
+      <p:sp>
+        <p:nvSpPr>
+          <p:cNvPr id="21" name="Text 17"/>
+          <p:cNvSpPr/>
+          <p:nvPr/>
+        </p:nvSpPr>
+        <p:spPr>
+          <a:xfrm>
+            <a:off x="1005840" y="3813048"/>
+            <a:ext cx="1554480" cy="292608"/>
+          </a:xfrm>
+          <a:prstGeom prst="rect">
+            <a:avLst/>
+          </a:prstGeom>
+          <a:noFill/>
+          <a:ln/>
+        </p:spPr>
+        <p:txBody>
+          <a:bodyPr wrap="square" lIns="0" tIns="0" rIns="0" bIns="0" rtlCol="0" anchor="ctr"/>
+          <a:lstStyle/>
+          <a:p>
+            <a:pPr indent="0" marL="0">
+              <a:buNone/>
+            </a:pPr>
+            <a:r>
+              <a:rPr lang="en-US" sz="1100" b="1" dirty="0">
+                <a:solidFill>
+                  <a:srgbClr val="0D9488"/>
+                </a:solidFill>
+                <a:latin typeface="Calibri" pitchFamily="34" charset="0"/>
+                <a:ea typeface="Calibri" pitchFamily="34" charset="-122"/>
+                <a:cs typeface="Calibri" pitchFamily="34" charset="-120"/>
+              </a:rPr>
+              <a:t>전하 보존</a:t>
+            </a:r>
+            <a:endParaRPr lang="en-US" sz="1100" dirty="0"/>
+          </a:p>
+        </p:txBody>
+      </p:sp>
+      <p:sp>
+        <p:nvSpPr>
+          <p:cNvPr id="22" name="Text 18"/>
+          <p:cNvSpPr/>
+          <p:nvPr/>
+        </p:nvSpPr>
+        <p:spPr>
+          <a:xfrm>
+            <a:off x="2606040" y="3813048"/>
+            <a:ext cx="1828800" cy="292608"/>
+          </a:xfrm>
+          <a:prstGeom prst="rect">
+            <a:avLst/>
+          </a:prstGeom>
+          <a:noFill/>
+          <a:ln/>
+        </p:spPr>
+        <p:txBody>
+          <a:bodyPr wrap="square" lIns="0" tIns="0" rIns="0" bIns="0" rtlCol="0" anchor="ctr"/>
+          <a:lstStyle/>
+          <a:p>
+            <a:pPr indent="0" marL="0">
+              <a:buNone/>
+            </a:pPr>
+            <a:r>
+              <a:rPr lang="en-US" sz="1100" dirty="0">
+                <a:solidFill>
+                  <a:srgbClr val="475569"/>
+                </a:solidFill>
+                <a:latin typeface="Calibri" pitchFamily="34" charset="0"/>
+                <a:ea typeface="Calibri" pitchFamily="34" charset="-122"/>
+                <a:cs typeface="Calibri" pitchFamily="34" charset="-120"/>
+              </a:rPr>
+              <a:t>고상/액상 전위 (Ohm's law)</a:t>
+            </a:r>
+            <a:endParaRPr lang="en-US" sz="1100" dirty="0"/>
+          </a:p>
+        </p:txBody>
+      </p:sp>
+      <p:sp>
+        <p:nvSpPr>
+          <p:cNvPr id="23" name="Text 19"/>
+          <p:cNvSpPr/>
+          <p:nvPr/>
+        </p:nvSpPr>
+        <p:spPr>
+          <a:xfrm>
+            <a:off x="1005840" y="4142232"/>
+            <a:ext cx="1554480" cy="292608"/>
+          </a:xfrm>
+          <a:prstGeom prst="rect">
+            <a:avLst/>
+          </a:prstGeom>
+          <a:noFill/>
+          <a:ln/>
+        </p:spPr>
+        <p:txBody>
+          <a:bodyPr wrap="square" lIns="0" tIns="0" rIns="0" bIns="0" rtlCol="0" anchor="ctr"/>
+          <a:lstStyle/>
+          <a:p>
+            <a:pPr indent="0" marL="0">
+              <a:buNone/>
+            </a:pPr>
+            <a:r>
+              <a:rPr lang="en-US" sz="1100" b="1" dirty="0">
+                <a:solidFill>
+                  <a:srgbClr val="0D9488"/>
+                </a:solidFill>
+                <a:latin typeface="Calibri" pitchFamily="34" charset="0"/>
+                <a:ea typeface="Calibri" pitchFamily="34" charset="-122"/>
+                <a:cs typeface="Calibri" pitchFamily="34" charset="-120"/>
+              </a:rPr>
+              <a:t>전하 이동 반응속도</a:t>
+            </a:r>
+            <a:endParaRPr lang="en-US" sz="1100" dirty="0"/>
+          </a:p>
+        </p:txBody>
+      </p:sp>
+      <p:sp>
+        <p:nvSpPr>
+          <p:cNvPr id="24" name="Text 20"/>
+          <p:cNvSpPr/>
+          <p:nvPr/>
+        </p:nvSpPr>
+        <p:spPr>
+          <a:xfrm>
+            <a:off x="2606040" y="4142232"/>
+            <a:ext cx="1828800" cy="292608"/>
+          </a:xfrm>
+          <a:prstGeom prst="rect">
+            <a:avLst/>
+          </a:prstGeom>
+          <a:noFill/>
+          <a:ln/>
+        </p:spPr>
+        <p:txBody>
+          <a:bodyPr wrap="square" lIns="0" tIns="0" rIns="0" bIns="0" rtlCol="0" anchor="ctr"/>
+          <a:lstStyle/>
+          <a:p>
+            <a:pPr indent="0" marL="0">
+              <a:buNone/>
+            </a:pPr>
+            <a:r>
+              <a:rPr lang="en-US" sz="1100" dirty="0">
+                <a:solidFill>
+                  <a:srgbClr val="475569"/>
+                </a:solidFill>
+                <a:latin typeface="Calibri" pitchFamily="34" charset="0"/>
+                <a:ea typeface="Calibri" pitchFamily="34" charset="-122"/>
+                <a:cs typeface="Calibri" pitchFamily="34" charset="-120"/>
+              </a:rPr>
+              <a:t>Butler-Volmer 식 (j₀, η, α)</a:t>
+            </a:r>
+            <a:endParaRPr lang="en-US" sz="1100" dirty="0"/>
+          </a:p>
+        </p:txBody>
+      </p:sp>
+      <p:sp>
+        <p:nvSpPr>
+          <p:cNvPr id="25" name="Shape 21"/>
+          <p:cNvSpPr/>
+          <p:nvPr/>
+        </p:nvSpPr>
+        <p:spPr>
+          <a:xfrm>
+            <a:off x="4846320" y="914400"/>
+            <a:ext cx="3749040" cy="3657600"/>
           </a:xfrm>
           <a:prstGeom prst="rect">
             <a:avLst/>
@@ -5564,14 +5892,14 @@
       </p:sp>
       <p:sp>
         <p:nvSpPr>
-          <p:cNvPr id="19" name="Text 15"/>
-          <p:cNvSpPr/>
-          <p:nvPr/>
-        </p:nvSpPr>
-        <p:spPr>
-          <a:xfrm>
-            <a:off x="4846320" y="2011680"/>
-            <a:ext cx="3749040" cy="1005840"/>
+          <p:cNvPr id="26" name="Text 22"/>
+          <p:cNvSpPr/>
+          <p:nvPr/>
+        </p:nvSpPr>
+        <p:spPr>
+          <a:xfrm>
+            <a:off x="4846320" y="2194560"/>
+            <a:ext cx="3749040" cy="731520"/>
           </a:xfrm>
           <a:prstGeom prst="rect">
             <a:avLst/>
@@ -5595,7 +5923,7 @@
                 <a:ea typeface="Calibri" pitchFamily="34" charset="-122"/>
                 <a:cs typeface="Calibri" pitchFamily="34" charset="-120"/>
               </a:rPr>
-              <a:t>UI 스크린샷</a:t>
+              <a:t>P2D 모델 구조도 또는</a:t>
             </a:r>
             <a:endParaRPr lang="en-US" sz="1400" dirty="0"/>
           </a:p>
@@ -5612,7 +5940,7 @@
                 <a:ea typeface="Calibri" pitchFamily="34" charset="-122"/>
                 <a:cs typeface="Calibri" pitchFamily="34" charset="-120"/>
               </a:rPr>
-              <a:t>(전기화학 탭 화면)</a:t>
+              <a:t>UI 스크린샷</a:t>
             </a:r>
             <a:endParaRPr lang="en-US" sz="1400" dirty="0"/>
           </a:p>
@@ -5620,60 +5948,57 @@
       </p:sp>
       <p:sp>
         <p:nvSpPr>
-          <p:cNvPr id="20" name="Shape 16"/>
-          <p:cNvSpPr/>
-          <p:nvPr/>
-        </p:nvSpPr>
-        <p:spPr>
-          <a:xfrm>
-            <a:off x="731520" y="4434840"/>
-            <a:ext cx="7680960" cy="502920"/>
-          </a:xfrm>
-          <a:prstGeom prst="rect">
-            <a:avLst/>
-          </a:prstGeom>
-          <a:solidFill>
-            <a:srgbClr val="CCFBF1"/>
-          </a:solidFill>
-          <a:ln/>
-        </p:spPr>
-      </p:sp>
-      <p:sp>
-        <p:nvSpPr>
-          <p:cNvPr id="21" name="Text 17"/>
-          <p:cNvSpPr/>
-          <p:nvPr/>
-        </p:nvSpPr>
-        <p:spPr>
-          <a:xfrm>
-            <a:off x="1005840" y="4434840"/>
-            <a:ext cx="7315200" cy="502920"/>
-          </a:xfrm>
-          <a:prstGeom prst="rect">
-            <a:avLst/>
-          </a:prstGeom>
-          <a:noFill/>
-          <a:ln/>
-        </p:spPr>
-        <p:txBody>
-          <a:bodyPr wrap="square" lIns="0" tIns="0" rIns="0" bIns="0" rtlCol="0" anchor="ctr"/>
-          <a:lstStyle/>
-          <a:p>
-            <a:pPr indent="0" marL="0">
-              <a:buNone/>
-            </a:pPr>
-            <a:r>
-              <a:rPr lang="en-US" sz="1300" b="1" dirty="0">
-                <a:solidFill>
-                  <a:srgbClr val="1B3A5C"/>
-                </a:solidFill>
-                <a:latin typeface="Calibri" pitchFamily="34" charset="0"/>
-                <a:ea typeface="Calibri" pitchFamily="34" charset="-122"/>
-                <a:cs typeface="Calibri" pitchFamily="34" charset="-120"/>
-              </a:rPr>
-              <a:t>향후 계획: 그룹 자체 측정 물성 데이터 반영 → 셀 설계 최적화 연계</a:t>
-            </a:r>
-            <a:endParaRPr lang="en-US" sz="1300" dirty="0"/>
+          <p:cNvPr id="27" name="Text 23"/>
+          <p:cNvSpPr/>
+          <p:nvPr/>
+        </p:nvSpPr>
+        <p:spPr>
+          <a:xfrm>
+            <a:off x="5029200" y="3200400"/>
+            <a:ext cx="3383280" cy="640080"/>
+          </a:xfrm>
+          <a:prstGeom prst="rect">
+            <a:avLst/>
+          </a:prstGeom>
+          <a:noFill/>
+          <a:ln/>
+        </p:spPr>
+        <p:txBody>
+          <a:bodyPr wrap="square" rtlCol="0" anchor="ctr"/>
+          <a:lstStyle/>
+          <a:p>
+            <a:pPr algn="ctr" indent="0" marL="0">
+              <a:buNone/>
+            </a:pPr>
+            <a:r>
+              <a:rPr lang="en-US" sz="1000" dirty="0">
+                <a:solidFill>
+                  <a:srgbClr val="64748B"/>
+                </a:solidFill>
+                <a:latin typeface="Consolas" pitchFamily="34" charset="0"/>
+                <a:ea typeface="Consolas" pitchFamily="34" charset="-122"/>
+                <a:cs typeface="Consolas" pitchFamily="34" charset="-120"/>
+              </a:rPr>
+              <a:t>음극 | 분리막 | 양극  ←  셀 두께 방향(x)</a:t>
+            </a:r>
+            <a:endParaRPr lang="en-US" sz="1000" dirty="0"/>
+          </a:p>
+          <a:p>
+            <a:pPr algn="ctr" indent="0" marL="0">
+              <a:buNone/>
+            </a:pPr>
+            <a:r>
+              <a:rPr lang="en-US" sz="1000" dirty="0">
+                <a:solidFill>
+                  <a:srgbClr val="64748B"/>
+                </a:solidFill>
+                <a:latin typeface="Consolas" pitchFamily="34" charset="0"/>
+                <a:ea typeface="Consolas" pitchFamily="34" charset="-122"/>
+                <a:cs typeface="Consolas" pitchFamily="34" charset="-120"/>
+              </a:rPr>
+              <a:t>입자 내부 반경 방향(r)  ←  고상 확산</a:t>
+            </a:r>
+            <a:endParaRPr lang="en-US" sz="1000" dirty="0"/>
           </a:p>
         </p:txBody>
       </p:sp>
@@ -5688,6 +6013,1450 @@
 <file path=ppt/slides/slide7.xml><?xml version="1.0" encoding="utf-8"?>
 <p:sld xmlns:a="http://schemas.openxmlformats.org/drawingml/2006/main" xmlns:r="http://schemas.openxmlformats.org/officeDocument/2006/relationships" xmlns:p="http://schemas.openxmlformats.org/presentationml/2006/main">
   <p:cSld name="Slide 7">
+    <p:bg>
+      <p:bgPr>
+        <a:solidFill>
+          <a:srgbClr val="FFFFFF"/>
+        </a:solidFill>
+      </p:bgPr>
+    </p:bg>
+    <p:spTree>
+      <p:nvGrpSpPr>
+        <p:cNvPr id="1" name=""/>
+        <p:cNvGrpSpPr/>
+        <p:nvPr/>
+      </p:nvGrpSpPr>
+      <p:grpSpPr>
+        <a:xfrm>
+          <a:off x="0" y="0"/>
+          <a:ext cx="0" cy="0"/>
+          <a:chOff x="0" y="0"/>
+          <a:chExt cx="0" cy="0"/>
+        </a:xfrm>
+      </p:grpSpPr>
+      <p:sp>
+        <p:nvSpPr>
+          <p:cNvPr id="2" name="Shape 0"/>
+          <p:cNvSpPr/>
+          <p:nvPr/>
+        </p:nvSpPr>
+        <p:spPr>
+          <a:xfrm>
+            <a:off x="0" y="0"/>
+            <a:ext cx="9144000" cy="54864"/>
+          </a:xfrm>
+          <a:prstGeom prst="rect">
+            <a:avLst/>
+          </a:prstGeom>
+          <a:solidFill>
+            <a:srgbClr val="0D9488"/>
+          </a:solidFill>
+          <a:ln/>
+        </p:spPr>
+      </p:sp>
+      <p:sp>
+        <p:nvSpPr>
+          <p:cNvPr id="3" name="Shape 1"/>
+          <p:cNvSpPr/>
+          <p:nvPr/>
+        </p:nvSpPr>
+        <p:spPr>
+          <a:xfrm>
+            <a:off x="731520" y="320040"/>
+            <a:ext cx="1371600" cy="320040"/>
+          </a:xfrm>
+          <a:prstGeom prst="rect">
+            <a:avLst/>
+          </a:prstGeom>
+          <a:solidFill>
+            <a:srgbClr val="0D9488"/>
+          </a:solidFill>
+          <a:ln/>
+        </p:spPr>
+      </p:sp>
+      <p:sp>
+        <p:nvSpPr>
+          <p:cNvPr id="4" name="Text 2"/>
+          <p:cNvSpPr/>
+          <p:nvPr/>
+        </p:nvSpPr>
+        <p:spPr>
+          <a:xfrm>
+            <a:off x="731520" y="320040"/>
+            <a:ext cx="1371600" cy="320040"/>
+          </a:xfrm>
+          <a:prstGeom prst="rect">
+            <a:avLst/>
+          </a:prstGeom>
+          <a:noFill/>
+          <a:ln/>
+        </p:spPr>
+        <p:txBody>
+          <a:bodyPr wrap="square" lIns="0" tIns="0" rIns="0" bIns="0" rtlCol="0" anchor="ctr"/>
+          <a:lstStyle/>
+          <a:p>
+            <a:pPr algn="ctr" indent="0" marL="0">
+              <a:buNone/>
+            </a:pPr>
+            <a:r>
+              <a:rPr lang="en-US" sz="1300" b="1" dirty="0">
+                <a:solidFill>
+                  <a:srgbClr val="FFFFFF"/>
+                </a:solidFill>
+                <a:latin typeface="Calibri" pitchFamily="34" charset="0"/>
+                <a:ea typeface="Calibri" pitchFamily="34" charset="-122"/>
+                <a:cs typeface="Calibri" pitchFamily="34" charset="-120"/>
+              </a:rPr>
+              <a:t>전기화학 탭</a:t>
+            </a:r>
+            <a:endParaRPr lang="en-US" sz="1300" dirty="0"/>
+          </a:p>
+        </p:txBody>
+      </p:sp>
+      <p:sp>
+        <p:nvSpPr>
+          <p:cNvPr id="5" name="Text 3"/>
+          <p:cNvSpPr/>
+          <p:nvPr/>
+        </p:nvSpPr>
+        <p:spPr>
+          <a:xfrm>
+            <a:off x="2286000" y="274320"/>
+            <a:ext cx="6400800" cy="411480"/>
+          </a:xfrm>
+          <a:prstGeom prst="rect">
+            <a:avLst/>
+          </a:prstGeom>
+          <a:noFill/>
+          <a:ln/>
+        </p:spPr>
+        <p:txBody>
+          <a:bodyPr wrap="square" lIns="0" tIns="0" rIns="0" bIns="0" rtlCol="0" anchor="ctr"/>
+          <a:lstStyle/>
+          <a:p>
+            <a:pPr indent="0" marL="0">
+              <a:buNone/>
+            </a:pPr>
+            <a:r>
+              <a:rPr lang="en-US" sz="2400" b="1" dirty="0">
+                <a:solidFill>
+                  <a:srgbClr val="0D1B2A"/>
+                </a:solidFill>
+                <a:latin typeface="Arial Black" pitchFamily="34" charset="0"/>
+                <a:ea typeface="Arial Black" pitchFamily="34" charset="-122"/>
+                <a:cs typeface="Arial Black" pitchFamily="34" charset="-120"/>
+              </a:rPr>
+              <a:t>파라미터 현황 — 프로토 버전 (문헌값)</a:t>
+            </a:r>
+            <a:endParaRPr lang="en-US" sz="2400" dirty="0"/>
+          </a:p>
+        </p:txBody>
+      </p:sp>
+      <p:sp>
+        <p:nvSpPr>
+          <p:cNvPr id="6" name="Shape 4"/>
+          <p:cNvSpPr/>
+          <p:nvPr/>
+        </p:nvSpPr>
+        <p:spPr>
+          <a:xfrm>
+            <a:off x="731520" y="960120"/>
+            <a:ext cx="7680960" cy="411480"/>
+          </a:xfrm>
+          <a:prstGeom prst="rect">
+            <a:avLst/>
+          </a:prstGeom>
+          <a:solidFill>
+            <a:srgbClr val="0D9488"/>
+          </a:solidFill>
+          <a:ln/>
+        </p:spPr>
+      </p:sp>
+      <p:sp>
+        <p:nvSpPr>
+          <p:cNvPr id="7" name="Text 5"/>
+          <p:cNvSpPr/>
+          <p:nvPr/>
+        </p:nvSpPr>
+        <p:spPr>
+          <a:xfrm>
+            <a:off x="731520" y="960120"/>
+            <a:ext cx="1371600" cy="411480"/>
+          </a:xfrm>
+          <a:prstGeom prst="rect">
+            <a:avLst/>
+          </a:prstGeom>
+          <a:noFill/>
+          <a:ln/>
+        </p:spPr>
+        <p:txBody>
+          <a:bodyPr wrap="square" lIns="0" tIns="0" rIns="0" bIns="0" rtlCol="0" anchor="ctr"/>
+          <a:lstStyle/>
+          <a:p>
+            <a:pPr algn="ctr" indent="0" marL="0">
+              <a:buNone/>
+            </a:pPr>
+            <a:r>
+              <a:rPr lang="en-US" sz="1300" b="1" dirty="0">
+                <a:solidFill>
+                  <a:srgbClr val="FFFFFF"/>
+                </a:solidFill>
+                <a:latin typeface="Calibri" pitchFamily="34" charset="0"/>
+                <a:ea typeface="Calibri" pitchFamily="34" charset="-122"/>
+                <a:cs typeface="Calibri" pitchFamily="34" charset="-120"/>
+              </a:rPr>
+              <a:t>분류</a:t>
+            </a:r>
+            <a:endParaRPr lang="en-US" sz="1300" dirty="0"/>
+          </a:p>
+        </p:txBody>
+      </p:sp>
+      <p:sp>
+        <p:nvSpPr>
+          <p:cNvPr id="8" name="Text 6"/>
+          <p:cNvSpPr/>
+          <p:nvPr/>
+        </p:nvSpPr>
+        <p:spPr>
+          <a:xfrm>
+            <a:off x="2103120" y="960120"/>
+            <a:ext cx="4389120" cy="411480"/>
+          </a:xfrm>
+          <a:prstGeom prst="rect">
+            <a:avLst/>
+          </a:prstGeom>
+          <a:noFill/>
+          <a:ln/>
+        </p:spPr>
+        <p:txBody>
+          <a:bodyPr wrap="square" lIns="0" tIns="0" rIns="0" bIns="0" rtlCol="0" anchor="ctr"/>
+          <a:lstStyle/>
+          <a:p>
+            <a:pPr algn="ctr" indent="0" marL="0">
+              <a:buNone/>
+            </a:pPr>
+            <a:r>
+              <a:rPr lang="en-US" sz="1300" b="1" dirty="0">
+                <a:solidFill>
+                  <a:srgbClr val="FFFFFF"/>
+                </a:solidFill>
+                <a:latin typeface="Calibri" pitchFamily="34" charset="0"/>
+                <a:ea typeface="Calibri" pitchFamily="34" charset="-122"/>
+                <a:cs typeface="Calibri" pitchFamily="34" charset="-120"/>
+              </a:rPr>
+              <a:t>주요 파라미터</a:t>
+            </a:r>
+            <a:endParaRPr lang="en-US" sz="1300" dirty="0"/>
+          </a:p>
+        </p:txBody>
+      </p:sp>
+      <p:sp>
+        <p:nvSpPr>
+          <p:cNvPr id="9" name="Text 7"/>
+          <p:cNvSpPr/>
+          <p:nvPr/>
+        </p:nvSpPr>
+        <p:spPr>
+          <a:xfrm>
+            <a:off x="6492240" y="960120"/>
+            <a:ext cx="1920240" cy="411480"/>
+          </a:xfrm>
+          <a:prstGeom prst="rect">
+            <a:avLst/>
+          </a:prstGeom>
+          <a:noFill/>
+          <a:ln/>
+        </p:spPr>
+        <p:txBody>
+          <a:bodyPr wrap="square" lIns="0" tIns="0" rIns="0" bIns="0" rtlCol="0" anchor="ctr"/>
+          <a:lstStyle/>
+          <a:p>
+            <a:pPr algn="ctr" indent="0" marL="0">
+              <a:buNone/>
+            </a:pPr>
+            <a:r>
+              <a:rPr lang="en-US" sz="1300" b="1" dirty="0">
+                <a:solidFill>
+                  <a:srgbClr val="FFFFFF"/>
+                </a:solidFill>
+                <a:latin typeface="Calibri" pitchFamily="34" charset="0"/>
+                <a:ea typeface="Calibri" pitchFamily="34" charset="-122"/>
+                <a:cs typeface="Calibri" pitchFamily="34" charset="-120"/>
+              </a:rPr>
+              <a:t>현재 출처</a:t>
+            </a:r>
+            <a:endParaRPr lang="en-US" sz="1300" dirty="0"/>
+          </a:p>
+        </p:txBody>
+      </p:sp>
+      <p:sp>
+        <p:nvSpPr>
+          <p:cNvPr id="10" name="Shape 8"/>
+          <p:cNvSpPr/>
+          <p:nvPr/>
+        </p:nvSpPr>
+        <p:spPr>
+          <a:xfrm>
+            <a:off x="731520" y="1371600"/>
+            <a:ext cx="7680960" cy="640080"/>
+          </a:xfrm>
+          <a:prstGeom prst="rect">
+            <a:avLst/>
+          </a:prstGeom>
+          <a:solidFill>
+            <a:srgbClr val="F0FDFA"/>
+          </a:solidFill>
+          <a:ln/>
+        </p:spPr>
+      </p:sp>
+      <p:sp>
+        <p:nvSpPr>
+          <p:cNvPr id="11" name="Shape 9"/>
+          <p:cNvSpPr/>
+          <p:nvPr/>
+        </p:nvSpPr>
+        <p:spPr>
+          <a:xfrm>
+            <a:off x="868680" y="1527048"/>
+            <a:ext cx="1097280" cy="329184"/>
+          </a:xfrm>
+          <a:prstGeom prst="rect">
+            <a:avLst/>
+          </a:prstGeom>
+          <a:solidFill>
+            <a:srgbClr val="0D9488"/>
+          </a:solidFill>
+          <a:ln/>
+        </p:spPr>
+      </p:sp>
+      <p:sp>
+        <p:nvSpPr>
+          <p:cNvPr id="12" name="Text 10"/>
+          <p:cNvSpPr/>
+          <p:nvPr/>
+        </p:nvSpPr>
+        <p:spPr>
+          <a:xfrm>
+            <a:off x="868680" y="1527048"/>
+            <a:ext cx="1097280" cy="329184"/>
+          </a:xfrm>
+          <a:prstGeom prst="rect">
+            <a:avLst/>
+          </a:prstGeom>
+          <a:noFill/>
+          <a:ln/>
+        </p:spPr>
+        <p:txBody>
+          <a:bodyPr wrap="square" lIns="0" tIns="0" rIns="0" bIns="0" rtlCol="0" anchor="ctr"/>
+          <a:lstStyle/>
+          <a:p>
+            <a:pPr algn="ctr" indent="0" marL="0">
+              <a:buNone/>
+            </a:pPr>
+            <a:r>
+              <a:rPr lang="en-US" sz="1100" b="1" dirty="0">
+                <a:solidFill>
+                  <a:srgbClr val="FFFFFF"/>
+                </a:solidFill>
+                <a:latin typeface="Calibri" pitchFamily="34" charset="0"/>
+                <a:ea typeface="Calibri" pitchFamily="34" charset="-122"/>
+                <a:cs typeface="Calibri" pitchFamily="34" charset="-120"/>
+              </a:rPr>
+              <a:t>기하학적</a:t>
+            </a:r>
+            <a:endParaRPr lang="en-US" sz="1100" dirty="0"/>
+          </a:p>
+        </p:txBody>
+      </p:sp>
+      <p:sp>
+        <p:nvSpPr>
+          <p:cNvPr id="13" name="Text 11"/>
+          <p:cNvSpPr/>
+          <p:nvPr/>
+        </p:nvSpPr>
+        <p:spPr>
+          <a:xfrm>
+            <a:off x="2194560" y="1371600"/>
+            <a:ext cx="4206240" cy="640080"/>
+          </a:xfrm>
+          <a:prstGeom prst="rect">
+            <a:avLst/>
+          </a:prstGeom>
+          <a:noFill/>
+          <a:ln/>
+        </p:spPr>
+        <p:txBody>
+          <a:bodyPr wrap="square" lIns="0" tIns="0" rIns="0" bIns="0" rtlCol="0" anchor="ctr"/>
+          <a:lstStyle/>
+          <a:p>
+            <a:pPr indent="0" marL="0">
+              <a:buNone/>
+            </a:pPr>
+            <a:r>
+              <a:rPr lang="en-US" sz="1200" dirty="0">
+                <a:solidFill>
+                  <a:srgbClr val="1E293B"/>
+                </a:solidFill>
+                <a:latin typeface="Calibri" pitchFamily="34" charset="0"/>
+                <a:ea typeface="Calibri" pitchFamily="34" charset="-122"/>
+                <a:cs typeface="Calibri" pitchFamily="34" charset="-120"/>
+              </a:rPr>
+              <a:t>전극 두께, 입자 반경, 공극률(ε)</a:t>
+            </a:r>
+            <a:endParaRPr lang="en-US" sz="1200" dirty="0"/>
+          </a:p>
+        </p:txBody>
+      </p:sp>
+      <p:sp>
+        <p:nvSpPr>
+          <p:cNvPr id="14" name="Shape 12"/>
+          <p:cNvSpPr/>
+          <p:nvPr/>
+        </p:nvSpPr>
+        <p:spPr>
+          <a:xfrm>
+            <a:off x="6720840" y="1554480"/>
+            <a:ext cx="1188720" cy="274320"/>
+          </a:xfrm>
+          <a:prstGeom prst="rect">
+            <a:avLst/>
+          </a:prstGeom>
+          <a:solidFill>
+            <a:srgbClr val="FEF3C7"/>
+          </a:solidFill>
+          <a:ln/>
+        </p:spPr>
+      </p:sp>
+      <p:sp>
+        <p:nvSpPr>
+          <p:cNvPr id="15" name="Text 13"/>
+          <p:cNvSpPr/>
+          <p:nvPr/>
+        </p:nvSpPr>
+        <p:spPr>
+          <a:xfrm>
+            <a:off x="6720840" y="1554480"/>
+            <a:ext cx="1188720" cy="274320"/>
+          </a:xfrm>
+          <a:prstGeom prst="rect">
+            <a:avLst/>
+          </a:prstGeom>
+          <a:noFill/>
+          <a:ln/>
+        </p:spPr>
+        <p:txBody>
+          <a:bodyPr wrap="square" lIns="0" tIns="0" rIns="0" bIns="0" rtlCol="0" anchor="ctr"/>
+          <a:lstStyle/>
+          <a:p>
+            <a:pPr algn="ctr" indent="0" marL="0">
+              <a:buNone/>
+            </a:pPr>
+            <a:r>
+              <a:rPr lang="en-US" sz="1100" b="1" dirty="0">
+                <a:solidFill>
+                  <a:srgbClr val="92400E"/>
+                </a:solidFill>
+                <a:latin typeface="Calibri" pitchFamily="34" charset="0"/>
+                <a:ea typeface="Calibri" pitchFamily="34" charset="-122"/>
+                <a:cs typeface="Calibri" pitchFamily="34" charset="-120"/>
+              </a:rPr>
+              <a:t>문헌값</a:t>
+            </a:r>
+            <a:endParaRPr lang="en-US" sz="1100" dirty="0"/>
+          </a:p>
+        </p:txBody>
+      </p:sp>
+      <p:sp>
+        <p:nvSpPr>
+          <p:cNvPr id="16" name="Shape 14"/>
+          <p:cNvSpPr/>
+          <p:nvPr/>
+        </p:nvSpPr>
+        <p:spPr>
+          <a:xfrm>
+            <a:off x="731520" y="2011680"/>
+            <a:ext cx="7680960" cy="640080"/>
+          </a:xfrm>
+          <a:prstGeom prst="rect">
+            <a:avLst/>
+          </a:prstGeom>
+          <a:solidFill>
+            <a:srgbClr val="FFFFFF"/>
+          </a:solidFill>
+          <a:ln/>
+        </p:spPr>
+      </p:sp>
+      <p:sp>
+        <p:nvSpPr>
+          <p:cNvPr id="17" name="Shape 15"/>
+          <p:cNvSpPr/>
+          <p:nvPr/>
+        </p:nvSpPr>
+        <p:spPr>
+          <a:xfrm>
+            <a:off x="868680" y="2167128"/>
+            <a:ext cx="1097280" cy="329184"/>
+          </a:xfrm>
+          <a:prstGeom prst="rect">
+            <a:avLst/>
+          </a:prstGeom>
+          <a:solidFill>
+            <a:srgbClr val="0D9488"/>
+          </a:solidFill>
+          <a:ln/>
+        </p:spPr>
+      </p:sp>
+      <p:sp>
+        <p:nvSpPr>
+          <p:cNvPr id="18" name="Text 16"/>
+          <p:cNvSpPr/>
+          <p:nvPr/>
+        </p:nvSpPr>
+        <p:spPr>
+          <a:xfrm>
+            <a:off x="868680" y="2167128"/>
+            <a:ext cx="1097280" cy="329184"/>
+          </a:xfrm>
+          <a:prstGeom prst="rect">
+            <a:avLst/>
+          </a:prstGeom>
+          <a:noFill/>
+          <a:ln/>
+        </p:spPr>
+        <p:txBody>
+          <a:bodyPr wrap="square" lIns="0" tIns="0" rIns="0" bIns="0" rtlCol="0" anchor="ctr"/>
+          <a:lstStyle/>
+          <a:p>
+            <a:pPr algn="ctr" indent="0" marL="0">
+              <a:buNone/>
+            </a:pPr>
+            <a:r>
+              <a:rPr lang="en-US" sz="1100" b="1" dirty="0">
+                <a:solidFill>
+                  <a:srgbClr val="FFFFFF"/>
+                </a:solidFill>
+                <a:latin typeface="Calibri" pitchFamily="34" charset="0"/>
+                <a:ea typeface="Calibri" pitchFamily="34" charset="-122"/>
+                <a:cs typeface="Calibri" pitchFamily="34" charset="-120"/>
+              </a:rPr>
+              <a:t>수송 물성</a:t>
+            </a:r>
+            <a:endParaRPr lang="en-US" sz="1100" dirty="0"/>
+          </a:p>
+        </p:txBody>
+      </p:sp>
+      <p:sp>
+        <p:nvSpPr>
+          <p:cNvPr id="19" name="Text 17"/>
+          <p:cNvSpPr/>
+          <p:nvPr/>
+        </p:nvSpPr>
+        <p:spPr>
+          <a:xfrm>
+            <a:off x="2194560" y="2011680"/>
+            <a:ext cx="4206240" cy="640080"/>
+          </a:xfrm>
+          <a:prstGeom prst="rect">
+            <a:avLst/>
+          </a:prstGeom>
+          <a:noFill/>
+          <a:ln/>
+        </p:spPr>
+        <p:txBody>
+          <a:bodyPr wrap="square" lIns="0" tIns="0" rIns="0" bIns="0" rtlCol="0" anchor="ctr"/>
+          <a:lstStyle/>
+          <a:p>
+            <a:pPr indent="0" marL="0">
+              <a:buNone/>
+            </a:pPr>
+            <a:r>
+              <a:rPr lang="en-US" sz="1200" dirty="0">
+                <a:solidFill>
+                  <a:srgbClr val="1E293B"/>
+                </a:solidFill>
+                <a:latin typeface="Calibri" pitchFamily="34" charset="0"/>
+                <a:ea typeface="Calibri" pitchFamily="34" charset="-122"/>
+                <a:cs typeface="Calibri" pitchFamily="34" charset="-120"/>
+              </a:rPr>
+              <a:t>고상 확산계수(Dₛ), 전해질 확산계수(Dₑ),</a:t>
+            </a:r>
+            <a:endParaRPr lang="en-US" sz="1200" dirty="0"/>
+          </a:p>
+          <a:p>
+            <a:pPr indent="0" marL="0">
+              <a:buNone/>
+            </a:pPr>
+            <a:r>
+              <a:rPr lang="en-US" sz="1200" dirty="0">
+                <a:solidFill>
+                  <a:srgbClr val="1E293B"/>
+                </a:solidFill>
+                <a:latin typeface="Calibri" pitchFamily="34" charset="0"/>
+                <a:ea typeface="Calibri" pitchFamily="34" charset="-122"/>
+                <a:cs typeface="Calibri" pitchFamily="34" charset="-120"/>
+              </a:rPr>
+              <a:t>이온전도도(κ), 전이 수(t⁺)</a:t>
+            </a:r>
+            <a:endParaRPr lang="en-US" sz="1200" dirty="0"/>
+          </a:p>
+        </p:txBody>
+      </p:sp>
+      <p:sp>
+        <p:nvSpPr>
+          <p:cNvPr id="20" name="Shape 18"/>
+          <p:cNvSpPr/>
+          <p:nvPr/>
+        </p:nvSpPr>
+        <p:spPr>
+          <a:xfrm>
+            <a:off x="6720840" y="2194560"/>
+            <a:ext cx="1188720" cy="274320"/>
+          </a:xfrm>
+          <a:prstGeom prst="rect">
+            <a:avLst/>
+          </a:prstGeom>
+          <a:solidFill>
+            <a:srgbClr val="FEF3C7"/>
+          </a:solidFill>
+          <a:ln/>
+        </p:spPr>
+      </p:sp>
+      <p:sp>
+        <p:nvSpPr>
+          <p:cNvPr id="21" name="Text 19"/>
+          <p:cNvSpPr/>
+          <p:nvPr/>
+        </p:nvSpPr>
+        <p:spPr>
+          <a:xfrm>
+            <a:off x="6720840" y="2194560"/>
+            <a:ext cx="1188720" cy="274320"/>
+          </a:xfrm>
+          <a:prstGeom prst="rect">
+            <a:avLst/>
+          </a:prstGeom>
+          <a:noFill/>
+          <a:ln/>
+        </p:spPr>
+        <p:txBody>
+          <a:bodyPr wrap="square" lIns="0" tIns="0" rIns="0" bIns="0" rtlCol="0" anchor="ctr"/>
+          <a:lstStyle/>
+          <a:p>
+            <a:pPr algn="ctr" indent="0" marL="0">
+              <a:buNone/>
+            </a:pPr>
+            <a:r>
+              <a:rPr lang="en-US" sz="1100" b="1" dirty="0">
+                <a:solidFill>
+                  <a:srgbClr val="92400E"/>
+                </a:solidFill>
+                <a:latin typeface="Calibri" pitchFamily="34" charset="0"/>
+                <a:ea typeface="Calibri" pitchFamily="34" charset="-122"/>
+                <a:cs typeface="Calibri" pitchFamily="34" charset="-120"/>
+              </a:rPr>
+              <a:t>문헌값</a:t>
+            </a:r>
+            <a:endParaRPr lang="en-US" sz="1100" dirty="0"/>
+          </a:p>
+        </p:txBody>
+      </p:sp>
+      <p:sp>
+        <p:nvSpPr>
+          <p:cNvPr id="22" name="Shape 20"/>
+          <p:cNvSpPr/>
+          <p:nvPr/>
+        </p:nvSpPr>
+        <p:spPr>
+          <a:xfrm>
+            <a:off x="731520" y="2651760"/>
+            <a:ext cx="7680960" cy="640080"/>
+          </a:xfrm>
+          <a:prstGeom prst="rect">
+            <a:avLst/>
+          </a:prstGeom>
+          <a:solidFill>
+            <a:srgbClr val="F0FDFA"/>
+          </a:solidFill>
+          <a:ln/>
+        </p:spPr>
+      </p:sp>
+      <p:sp>
+        <p:nvSpPr>
+          <p:cNvPr id="23" name="Shape 21"/>
+          <p:cNvSpPr/>
+          <p:nvPr/>
+        </p:nvSpPr>
+        <p:spPr>
+          <a:xfrm>
+            <a:off x="868680" y="2807208"/>
+            <a:ext cx="1097280" cy="329184"/>
+          </a:xfrm>
+          <a:prstGeom prst="rect">
+            <a:avLst/>
+          </a:prstGeom>
+          <a:solidFill>
+            <a:srgbClr val="0D9488"/>
+          </a:solidFill>
+          <a:ln/>
+        </p:spPr>
+      </p:sp>
+      <p:sp>
+        <p:nvSpPr>
+          <p:cNvPr id="24" name="Text 22"/>
+          <p:cNvSpPr/>
+          <p:nvPr/>
+        </p:nvSpPr>
+        <p:spPr>
+          <a:xfrm>
+            <a:off x="868680" y="2807208"/>
+            <a:ext cx="1097280" cy="329184"/>
+          </a:xfrm>
+          <a:prstGeom prst="rect">
+            <a:avLst/>
+          </a:prstGeom>
+          <a:noFill/>
+          <a:ln/>
+        </p:spPr>
+        <p:txBody>
+          <a:bodyPr wrap="square" lIns="0" tIns="0" rIns="0" bIns="0" rtlCol="0" anchor="ctr"/>
+          <a:lstStyle/>
+          <a:p>
+            <a:pPr algn="ctr" indent="0" marL="0">
+              <a:buNone/>
+            </a:pPr>
+            <a:r>
+              <a:rPr lang="en-US" sz="1100" b="1" dirty="0">
+                <a:solidFill>
+                  <a:srgbClr val="FFFFFF"/>
+                </a:solidFill>
+                <a:latin typeface="Calibri" pitchFamily="34" charset="0"/>
+                <a:ea typeface="Calibri" pitchFamily="34" charset="-122"/>
+                <a:cs typeface="Calibri" pitchFamily="34" charset="-120"/>
+              </a:rPr>
+              <a:t>반응속도</a:t>
+            </a:r>
+            <a:endParaRPr lang="en-US" sz="1100" dirty="0"/>
+          </a:p>
+        </p:txBody>
+      </p:sp>
+      <p:sp>
+        <p:nvSpPr>
+          <p:cNvPr id="25" name="Text 23"/>
+          <p:cNvSpPr/>
+          <p:nvPr/>
+        </p:nvSpPr>
+        <p:spPr>
+          <a:xfrm>
+            <a:off x="2194560" y="2651760"/>
+            <a:ext cx="4206240" cy="640080"/>
+          </a:xfrm>
+          <a:prstGeom prst="rect">
+            <a:avLst/>
+          </a:prstGeom>
+          <a:noFill/>
+          <a:ln/>
+        </p:spPr>
+        <p:txBody>
+          <a:bodyPr wrap="square" lIns="0" tIns="0" rIns="0" bIns="0" rtlCol="0" anchor="ctr"/>
+          <a:lstStyle/>
+          <a:p>
+            <a:pPr indent="0" marL="0">
+              <a:buNone/>
+            </a:pPr>
+            <a:r>
+              <a:rPr lang="en-US" sz="1200" dirty="0">
+                <a:solidFill>
+                  <a:srgbClr val="1E293B"/>
+                </a:solidFill>
+                <a:latin typeface="Calibri" pitchFamily="34" charset="0"/>
+                <a:ea typeface="Calibri" pitchFamily="34" charset="-122"/>
+                <a:cs typeface="Calibri" pitchFamily="34" charset="-120"/>
+              </a:rPr>
+              <a:t>반응 속도 상수(k₀), 전하이동계수(α)</a:t>
+            </a:r>
+            <a:endParaRPr lang="en-US" sz="1200" dirty="0"/>
+          </a:p>
+        </p:txBody>
+      </p:sp>
+      <p:sp>
+        <p:nvSpPr>
+          <p:cNvPr id="26" name="Shape 24"/>
+          <p:cNvSpPr/>
+          <p:nvPr/>
+        </p:nvSpPr>
+        <p:spPr>
+          <a:xfrm>
+            <a:off x="6720840" y="2834640"/>
+            <a:ext cx="1188720" cy="274320"/>
+          </a:xfrm>
+          <a:prstGeom prst="rect">
+            <a:avLst/>
+          </a:prstGeom>
+          <a:solidFill>
+            <a:srgbClr val="FEF3C7"/>
+          </a:solidFill>
+          <a:ln/>
+        </p:spPr>
+      </p:sp>
+      <p:sp>
+        <p:nvSpPr>
+          <p:cNvPr id="27" name="Text 25"/>
+          <p:cNvSpPr/>
+          <p:nvPr/>
+        </p:nvSpPr>
+        <p:spPr>
+          <a:xfrm>
+            <a:off x="6720840" y="2834640"/>
+            <a:ext cx="1188720" cy="274320"/>
+          </a:xfrm>
+          <a:prstGeom prst="rect">
+            <a:avLst/>
+          </a:prstGeom>
+          <a:noFill/>
+          <a:ln/>
+        </p:spPr>
+        <p:txBody>
+          <a:bodyPr wrap="square" lIns="0" tIns="0" rIns="0" bIns="0" rtlCol="0" anchor="ctr"/>
+          <a:lstStyle/>
+          <a:p>
+            <a:pPr algn="ctr" indent="0" marL="0">
+              <a:buNone/>
+            </a:pPr>
+            <a:r>
+              <a:rPr lang="en-US" sz="1100" b="1" dirty="0">
+                <a:solidFill>
+                  <a:srgbClr val="92400E"/>
+                </a:solidFill>
+                <a:latin typeface="Calibri" pitchFamily="34" charset="0"/>
+                <a:ea typeface="Calibri" pitchFamily="34" charset="-122"/>
+                <a:cs typeface="Calibri" pitchFamily="34" charset="-120"/>
+              </a:rPr>
+              <a:t>문헌값</a:t>
+            </a:r>
+            <a:endParaRPr lang="en-US" sz="1100" dirty="0"/>
+          </a:p>
+        </p:txBody>
+      </p:sp>
+      <p:sp>
+        <p:nvSpPr>
+          <p:cNvPr id="28" name="Shape 26"/>
+          <p:cNvSpPr/>
+          <p:nvPr/>
+        </p:nvSpPr>
+        <p:spPr>
+          <a:xfrm>
+            <a:off x="731520" y="3291840"/>
+            <a:ext cx="7680960" cy="640080"/>
+          </a:xfrm>
+          <a:prstGeom prst="rect">
+            <a:avLst/>
+          </a:prstGeom>
+          <a:solidFill>
+            <a:srgbClr val="FFFFFF"/>
+          </a:solidFill>
+          <a:ln/>
+        </p:spPr>
+      </p:sp>
+      <p:sp>
+        <p:nvSpPr>
+          <p:cNvPr id="29" name="Shape 27"/>
+          <p:cNvSpPr/>
+          <p:nvPr/>
+        </p:nvSpPr>
+        <p:spPr>
+          <a:xfrm>
+            <a:off x="868680" y="3447288"/>
+            <a:ext cx="1097280" cy="329184"/>
+          </a:xfrm>
+          <a:prstGeom prst="rect">
+            <a:avLst/>
+          </a:prstGeom>
+          <a:solidFill>
+            <a:srgbClr val="0D9488"/>
+          </a:solidFill>
+          <a:ln/>
+        </p:spPr>
+      </p:sp>
+      <p:sp>
+        <p:nvSpPr>
+          <p:cNvPr id="30" name="Text 28"/>
+          <p:cNvSpPr/>
+          <p:nvPr/>
+        </p:nvSpPr>
+        <p:spPr>
+          <a:xfrm>
+            <a:off x="868680" y="3447288"/>
+            <a:ext cx="1097280" cy="329184"/>
+          </a:xfrm>
+          <a:prstGeom prst="rect">
+            <a:avLst/>
+          </a:prstGeom>
+          <a:noFill/>
+          <a:ln/>
+        </p:spPr>
+        <p:txBody>
+          <a:bodyPr wrap="square" lIns="0" tIns="0" rIns="0" bIns="0" rtlCol="0" anchor="ctr"/>
+          <a:lstStyle/>
+          <a:p>
+            <a:pPr algn="ctr" indent="0" marL="0">
+              <a:buNone/>
+            </a:pPr>
+            <a:r>
+              <a:rPr lang="en-US" sz="1100" b="1" dirty="0">
+                <a:solidFill>
+                  <a:srgbClr val="FFFFFF"/>
+                </a:solidFill>
+                <a:latin typeface="Calibri" pitchFamily="34" charset="0"/>
+                <a:ea typeface="Calibri" pitchFamily="34" charset="-122"/>
+                <a:cs typeface="Calibri" pitchFamily="34" charset="-120"/>
+              </a:rPr>
+              <a:t>열역학적</a:t>
+            </a:r>
+            <a:endParaRPr lang="en-US" sz="1100" dirty="0"/>
+          </a:p>
+        </p:txBody>
+      </p:sp>
+      <p:sp>
+        <p:nvSpPr>
+          <p:cNvPr id="31" name="Text 29"/>
+          <p:cNvSpPr/>
+          <p:nvPr/>
+        </p:nvSpPr>
+        <p:spPr>
+          <a:xfrm>
+            <a:off x="2194560" y="3291840"/>
+            <a:ext cx="4206240" cy="640080"/>
+          </a:xfrm>
+          <a:prstGeom prst="rect">
+            <a:avLst/>
+          </a:prstGeom>
+          <a:noFill/>
+          <a:ln/>
+        </p:spPr>
+        <p:txBody>
+          <a:bodyPr wrap="square" lIns="0" tIns="0" rIns="0" bIns="0" rtlCol="0" anchor="ctr"/>
+          <a:lstStyle/>
+          <a:p>
+            <a:pPr indent="0" marL="0">
+              <a:buNone/>
+            </a:pPr>
+            <a:r>
+              <a:rPr lang="en-US" sz="1200" dirty="0">
+                <a:solidFill>
+                  <a:srgbClr val="1E293B"/>
+                </a:solidFill>
+                <a:latin typeface="Calibri" pitchFamily="34" charset="0"/>
+                <a:ea typeface="Calibri" pitchFamily="34" charset="-122"/>
+                <a:cs typeface="Calibri" pitchFamily="34" charset="-120"/>
+              </a:rPr>
+              <a:t>OCV 곡선 (개방회로전압 vs SOC)</a:t>
+            </a:r>
+            <a:endParaRPr lang="en-US" sz="1200" dirty="0"/>
+          </a:p>
+        </p:txBody>
+      </p:sp>
+      <p:sp>
+        <p:nvSpPr>
+          <p:cNvPr id="32" name="Shape 30"/>
+          <p:cNvSpPr/>
+          <p:nvPr/>
+        </p:nvSpPr>
+        <p:spPr>
+          <a:xfrm>
+            <a:off x="6720840" y="3474720"/>
+            <a:ext cx="1188720" cy="274320"/>
+          </a:xfrm>
+          <a:prstGeom prst="rect">
+            <a:avLst/>
+          </a:prstGeom>
+          <a:solidFill>
+            <a:srgbClr val="FEF3C7"/>
+          </a:solidFill>
+          <a:ln/>
+        </p:spPr>
+      </p:sp>
+      <p:sp>
+        <p:nvSpPr>
+          <p:cNvPr id="33" name="Text 31"/>
+          <p:cNvSpPr/>
+          <p:nvPr/>
+        </p:nvSpPr>
+        <p:spPr>
+          <a:xfrm>
+            <a:off x="6720840" y="3474720"/>
+            <a:ext cx="1188720" cy="274320"/>
+          </a:xfrm>
+          <a:prstGeom prst="rect">
+            <a:avLst/>
+          </a:prstGeom>
+          <a:noFill/>
+          <a:ln/>
+        </p:spPr>
+        <p:txBody>
+          <a:bodyPr wrap="square" lIns="0" tIns="0" rIns="0" bIns="0" rtlCol="0" anchor="ctr"/>
+          <a:lstStyle/>
+          <a:p>
+            <a:pPr algn="ctr" indent="0" marL="0">
+              <a:buNone/>
+            </a:pPr>
+            <a:r>
+              <a:rPr lang="en-US" sz="1100" b="1" dirty="0">
+                <a:solidFill>
+                  <a:srgbClr val="92400E"/>
+                </a:solidFill>
+                <a:latin typeface="Calibri" pitchFamily="34" charset="0"/>
+                <a:ea typeface="Calibri" pitchFamily="34" charset="-122"/>
+                <a:cs typeface="Calibri" pitchFamily="34" charset="-120"/>
+              </a:rPr>
+              <a:t>문헌값</a:t>
+            </a:r>
+            <a:endParaRPr lang="en-US" sz="1100" dirty="0"/>
+          </a:p>
+        </p:txBody>
+      </p:sp>
+      <p:sp>
+        <p:nvSpPr>
+          <p:cNvPr id="34" name="Text 32"/>
+          <p:cNvSpPr/>
+          <p:nvPr/>
+        </p:nvSpPr>
+        <p:spPr>
+          <a:xfrm>
+            <a:off x="731520" y="3794760"/>
+            <a:ext cx="2743200" cy="320040"/>
+          </a:xfrm>
+          <a:prstGeom prst="rect">
+            <a:avLst/>
+          </a:prstGeom>
+          <a:noFill/>
+          <a:ln/>
+        </p:spPr>
+        <p:txBody>
+          <a:bodyPr wrap="square" lIns="0" tIns="0" rIns="0" bIns="0" rtlCol="0" anchor="ctr"/>
+          <a:lstStyle/>
+          <a:p>
+            <a:pPr indent="0" marL="0">
+              <a:buNone/>
+            </a:pPr>
+            <a:r>
+              <a:rPr lang="en-US" sz="1600" b="1" dirty="0">
+                <a:solidFill>
+                  <a:srgbClr val="0D1B2A"/>
+                </a:solidFill>
+                <a:latin typeface="Arial Black" pitchFamily="34" charset="0"/>
+                <a:ea typeface="Arial Black" pitchFamily="34" charset="-122"/>
+                <a:cs typeface="Arial Black" pitchFamily="34" charset="-120"/>
+              </a:rPr>
+              <a:t>향후 로드맵</a:t>
+            </a:r>
+            <a:endParaRPr lang="en-US" sz="1600" dirty="0"/>
+          </a:p>
+        </p:txBody>
+      </p:sp>
+      <p:sp>
+        <p:nvSpPr>
+          <p:cNvPr id="35" name="Shape 33"/>
+          <p:cNvSpPr/>
+          <p:nvPr/>
+        </p:nvSpPr>
+        <p:spPr>
+          <a:xfrm>
+            <a:off x="731520" y="4251960"/>
+            <a:ext cx="411480" cy="411480"/>
+          </a:xfrm>
+          <a:prstGeom prst="ellipse">
+            <a:avLst/>
+          </a:prstGeom>
+          <a:solidFill>
+            <a:srgbClr val="F59E0B"/>
+          </a:solidFill>
+          <a:ln/>
+        </p:spPr>
+      </p:sp>
+      <p:sp>
+        <p:nvSpPr>
+          <p:cNvPr id="36" name="Text 34"/>
+          <p:cNvSpPr/>
+          <p:nvPr/>
+        </p:nvSpPr>
+        <p:spPr>
+          <a:xfrm>
+            <a:off x="731520" y="4251960"/>
+            <a:ext cx="411480" cy="411480"/>
+          </a:xfrm>
+          <a:prstGeom prst="rect">
+            <a:avLst/>
+          </a:prstGeom>
+          <a:noFill/>
+          <a:ln/>
+        </p:spPr>
+        <p:txBody>
+          <a:bodyPr wrap="square" lIns="0" tIns="0" rIns="0" bIns="0" rtlCol="0" anchor="ctr"/>
+          <a:lstStyle/>
+          <a:p>
+            <a:pPr algn="ctr" indent="0" marL="0">
+              <a:buNone/>
+            </a:pPr>
+            <a:r>
+              <a:rPr lang="en-US" sz="1600" b="1" dirty="0">
+                <a:solidFill>
+                  <a:srgbClr val="FFFFFF"/>
+                </a:solidFill>
+                <a:latin typeface="Arial Black" pitchFamily="34" charset="0"/>
+                <a:ea typeface="Arial Black" pitchFamily="34" charset="-122"/>
+                <a:cs typeface="Arial Black" pitchFamily="34" charset="-120"/>
+              </a:rPr>
+              <a:t>1</a:t>
+            </a:r>
+            <a:endParaRPr lang="en-US" sz="1600" dirty="0"/>
+          </a:p>
+        </p:txBody>
+      </p:sp>
+      <p:sp>
+        <p:nvSpPr>
+          <p:cNvPr id="37" name="Text 35"/>
+          <p:cNvSpPr/>
+          <p:nvPr/>
+        </p:nvSpPr>
+        <p:spPr>
+          <a:xfrm>
+            <a:off x="1280160" y="4206240"/>
+            <a:ext cx="2011680" cy="502920"/>
+          </a:xfrm>
+          <a:prstGeom prst="rect">
+            <a:avLst/>
+          </a:prstGeom>
+          <a:noFill/>
+          <a:ln/>
+        </p:spPr>
+        <p:txBody>
+          <a:bodyPr wrap="square" lIns="0" tIns="0" rIns="0" bIns="0" rtlCol="0" anchor="ctr"/>
+          <a:lstStyle/>
+          <a:p>
+            <a:pPr indent="0" marL="0">
+              <a:buNone/>
+            </a:pPr>
+            <a:r>
+              <a:rPr lang="en-US" sz="1200" dirty="0">
+                <a:solidFill>
+                  <a:srgbClr val="1E293B"/>
+                </a:solidFill>
+                <a:latin typeface="Calibri" pitchFamily="34" charset="0"/>
+                <a:ea typeface="Calibri" pitchFamily="34" charset="-122"/>
+                <a:cs typeface="Calibri" pitchFamily="34" charset="-120"/>
+              </a:rPr>
+              <a:t>자체 물성 측정</a:t>
+            </a:r>
+            <a:endParaRPr lang="en-US" sz="1200" dirty="0"/>
+          </a:p>
+          <a:p>
+            <a:pPr indent="0" marL="0">
+              <a:buNone/>
+            </a:pPr>
+            <a:r>
+              <a:rPr lang="en-US" sz="1200" dirty="0">
+                <a:solidFill>
+                  <a:srgbClr val="1E293B"/>
+                </a:solidFill>
+                <a:latin typeface="Calibri" pitchFamily="34" charset="0"/>
+                <a:ea typeface="Calibri" pitchFamily="34" charset="-122"/>
+                <a:cs typeface="Calibri" pitchFamily="34" charset="-120"/>
+              </a:rPr>
+              <a:t>(EIS, GITT 등)</a:t>
+            </a:r>
+            <a:endParaRPr lang="en-US" sz="1200" dirty="0"/>
+          </a:p>
+        </p:txBody>
+      </p:sp>
+      <p:pic>
+        <p:nvPicPr>
+          <p:cNvPr id="38" name="Image 0" descr="preencoded.png">    </p:cNvPr>
+          <p:cNvPicPr>
+            <a:picLocks noChangeAspect="1"/>
+          </p:cNvPicPr>
+          <p:nvPr/>
+        </p:nvPicPr>
+        <p:blipFill>
+          <a:blip r:embed="rId1"/>
+          <a:stretch>
+            <a:fillRect/>
+          </a:stretch>
+        </p:blipFill>
+        <p:spPr>
+          <a:xfrm>
+            <a:off x="3337560" y="4315968"/>
+            <a:ext cx="228600" cy="228600"/>
+          </a:xfrm>
+          <a:prstGeom prst="rect">
+            <a:avLst/>
+          </a:prstGeom>
+        </p:spPr>
+      </p:pic>
+      <p:sp>
+        <p:nvSpPr>
+          <p:cNvPr id="39" name="Shape 36"/>
+          <p:cNvSpPr/>
+          <p:nvPr/>
+        </p:nvSpPr>
+        <p:spPr>
+          <a:xfrm>
+            <a:off x="3611880" y="4251960"/>
+            <a:ext cx="411480" cy="411480"/>
+          </a:xfrm>
+          <a:prstGeom prst="ellipse">
+            <a:avLst/>
+          </a:prstGeom>
+          <a:solidFill>
+            <a:srgbClr val="0D9488"/>
+          </a:solidFill>
+          <a:ln/>
+        </p:spPr>
+      </p:sp>
+      <p:sp>
+        <p:nvSpPr>
+          <p:cNvPr id="40" name="Text 37"/>
+          <p:cNvSpPr/>
+          <p:nvPr/>
+        </p:nvSpPr>
+        <p:spPr>
+          <a:xfrm>
+            <a:off x="3611880" y="4251960"/>
+            <a:ext cx="411480" cy="411480"/>
+          </a:xfrm>
+          <a:prstGeom prst="rect">
+            <a:avLst/>
+          </a:prstGeom>
+          <a:noFill/>
+          <a:ln/>
+        </p:spPr>
+        <p:txBody>
+          <a:bodyPr wrap="square" lIns="0" tIns="0" rIns="0" bIns="0" rtlCol="0" anchor="ctr"/>
+          <a:lstStyle/>
+          <a:p>
+            <a:pPr algn="ctr" indent="0" marL="0">
+              <a:buNone/>
+            </a:pPr>
+            <a:r>
+              <a:rPr lang="en-US" sz="1600" b="1" dirty="0">
+                <a:solidFill>
+                  <a:srgbClr val="FFFFFF"/>
+                </a:solidFill>
+                <a:latin typeface="Arial Black" pitchFamily="34" charset="0"/>
+                <a:ea typeface="Arial Black" pitchFamily="34" charset="-122"/>
+                <a:cs typeface="Arial Black" pitchFamily="34" charset="-120"/>
+              </a:rPr>
+              <a:t>2</a:t>
+            </a:r>
+            <a:endParaRPr lang="en-US" sz="1600" dirty="0"/>
+          </a:p>
+        </p:txBody>
+      </p:sp>
+      <p:sp>
+        <p:nvSpPr>
+          <p:cNvPr id="41" name="Text 38"/>
+          <p:cNvSpPr/>
+          <p:nvPr/>
+        </p:nvSpPr>
+        <p:spPr>
+          <a:xfrm>
+            <a:off x="4160520" y="4206240"/>
+            <a:ext cx="2011680" cy="502920"/>
+          </a:xfrm>
+          <a:prstGeom prst="rect">
+            <a:avLst/>
+          </a:prstGeom>
+          <a:noFill/>
+          <a:ln/>
+        </p:spPr>
+        <p:txBody>
+          <a:bodyPr wrap="square" lIns="0" tIns="0" rIns="0" bIns="0" rtlCol="0" anchor="ctr"/>
+          <a:lstStyle/>
+          <a:p>
+            <a:pPr indent="0" marL="0">
+              <a:buNone/>
+            </a:pPr>
+            <a:r>
+              <a:rPr lang="en-US" sz="1200" dirty="0">
+                <a:solidFill>
+                  <a:srgbClr val="1E293B"/>
+                </a:solidFill>
+                <a:latin typeface="Calibri" pitchFamily="34" charset="0"/>
+                <a:ea typeface="Calibri" pitchFamily="34" charset="-122"/>
+                <a:cs typeface="Calibri" pitchFamily="34" charset="-120"/>
+              </a:rPr>
+              <a:t>측정값 반영</a:t>
+            </a:r>
+            <a:endParaRPr lang="en-US" sz="1200" dirty="0"/>
+          </a:p>
+          <a:p>
+            <a:pPr indent="0" marL="0">
+              <a:buNone/>
+            </a:pPr>
+            <a:r>
+              <a:rPr lang="en-US" sz="1200" dirty="0">
+                <a:solidFill>
+                  <a:srgbClr val="1E293B"/>
+                </a:solidFill>
+                <a:latin typeface="Calibri" pitchFamily="34" charset="0"/>
+                <a:ea typeface="Calibri" pitchFamily="34" charset="-122"/>
+                <a:cs typeface="Calibri" pitchFamily="34" charset="-120"/>
+              </a:rPr>
+              <a:t>모델 캘리브레이션</a:t>
+            </a:r>
+            <a:endParaRPr lang="en-US" sz="1200" dirty="0"/>
+          </a:p>
+        </p:txBody>
+      </p:sp>
+      <p:pic>
+        <p:nvPicPr>
+          <p:cNvPr id="42" name="Image 1" descr="preencoded.png">    </p:cNvPr>
+          <p:cNvPicPr>
+            <a:picLocks noChangeAspect="1"/>
+          </p:cNvPicPr>
+          <p:nvPr/>
+        </p:nvPicPr>
+        <p:blipFill>
+          <a:blip r:embed="rId2"/>
+          <a:stretch>
+            <a:fillRect/>
+          </a:stretch>
+        </p:blipFill>
+        <p:spPr>
+          <a:xfrm>
+            <a:off x="6217920" y="4315968"/>
+            <a:ext cx="228600" cy="228600"/>
+          </a:xfrm>
+          <a:prstGeom prst="rect">
+            <a:avLst/>
+          </a:prstGeom>
+        </p:spPr>
+      </p:pic>
+      <p:sp>
+        <p:nvSpPr>
+          <p:cNvPr id="43" name="Shape 39"/>
+          <p:cNvSpPr/>
+          <p:nvPr/>
+        </p:nvSpPr>
+        <p:spPr>
+          <a:xfrm>
+            <a:off x="6492240" y="4251960"/>
+            <a:ext cx="411480" cy="411480"/>
+          </a:xfrm>
+          <a:prstGeom prst="ellipse">
+            <a:avLst/>
+          </a:prstGeom>
+          <a:solidFill>
+            <a:srgbClr val="1B3A5C"/>
+          </a:solidFill>
+          <a:ln/>
+        </p:spPr>
+      </p:sp>
+      <p:sp>
+        <p:nvSpPr>
+          <p:cNvPr id="44" name="Text 40"/>
+          <p:cNvSpPr/>
+          <p:nvPr/>
+        </p:nvSpPr>
+        <p:spPr>
+          <a:xfrm>
+            <a:off x="6492240" y="4251960"/>
+            <a:ext cx="411480" cy="411480"/>
+          </a:xfrm>
+          <a:prstGeom prst="rect">
+            <a:avLst/>
+          </a:prstGeom>
+          <a:noFill/>
+          <a:ln/>
+        </p:spPr>
+        <p:txBody>
+          <a:bodyPr wrap="square" lIns="0" tIns="0" rIns="0" bIns="0" rtlCol="0" anchor="ctr"/>
+          <a:lstStyle/>
+          <a:p>
+            <a:pPr algn="ctr" indent="0" marL="0">
+              <a:buNone/>
+            </a:pPr>
+            <a:r>
+              <a:rPr lang="en-US" sz="1600" b="1" dirty="0">
+                <a:solidFill>
+                  <a:srgbClr val="FFFFFF"/>
+                </a:solidFill>
+                <a:latin typeface="Arial Black" pitchFamily="34" charset="0"/>
+                <a:ea typeface="Arial Black" pitchFamily="34" charset="-122"/>
+                <a:cs typeface="Arial Black" pitchFamily="34" charset="-120"/>
+              </a:rPr>
+              <a:t>3</a:t>
+            </a:r>
+            <a:endParaRPr lang="en-US" sz="1600" dirty="0"/>
+          </a:p>
+        </p:txBody>
+      </p:sp>
+      <p:sp>
+        <p:nvSpPr>
+          <p:cNvPr id="45" name="Text 41"/>
+          <p:cNvSpPr/>
+          <p:nvPr/>
+        </p:nvSpPr>
+        <p:spPr>
+          <a:xfrm>
+            <a:off x="7040880" y="4206240"/>
+            <a:ext cx="2011680" cy="502920"/>
+          </a:xfrm>
+          <a:prstGeom prst="rect">
+            <a:avLst/>
+          </a:prstGeom>
+          <a:noFill/>
+          <a:ln/>
+        </p:spPr>
+        <p:txBody>
+          <a:bodyPr wrap="square" lIns="0" tIns="0" rIns="0" bIns="0" rtlCol="0" anchor="ctr"/>
+          <a:lstStyle/>
+          <a:p>
+            <a:pPr indent="0" marL="0">
+              <a:buNone/>
+            </a:pPr>
+            <a:r>
+              <a:rPr lang="en-US" sz="1200" dirty="0">
+                <a:solidFill>
+                  <a:srgbClr val="1E293B"/>
+                </a:solidFill>
+                <a:latin typeface="Calibri" pitchFamily="34" charset="0"/>
+                <a:ea typeface="Calibri" pitchFamily="34" charset="-122"/>
+                <a:cs typeface="Calibri" pitchFamily="34" charset="-120"/>
+              </a:rPr>
+              <a:t>셀 설계 최적화</a:t>
+            </a:r>
+            <a:endParaRPr lang="en-US" sz="1200" dirty="0"/>
+          </a:p>
+          <a:p>
+            <a:pPr indent="0" marL="0">
+              <a:buNone/>
+            </a:pPr>
+            <a:r>
+              <a:rPr lang="en-US" sz="1200" dirty="0">
+                <a:solidFill>
+                  <a:srgbClr val="1E293B"/>
+                </a:solidFill>
+                <a:latin typeface="Calibri" pitchFamily="34" charset="0"/>
+                <a:ea typeface="Calibri" pitchFamily="34" charset="-122"/>
+                <a:cs typeface="Calibri" pitchFamily="34" charset="-120"/>
+              </a:rPr>
+              <a:t>연계 활용</a:t>
+            </a:r>
+            <a:endParaRPr lang="en-US" sz="1200" dirty="0"/>
+          </a:p>
+        </p:txBody>
+      </p:sp>
+    </p:spTree>
+  </p:cSld>
+  <p:clrMapOvr>
+    <a:masterClrMapping/>
+  </p:clrMapOvr>
+</p:sld>
+</file>
+
+<file path=ppt/slides/slide8.xml><?xml version="1.0" encoding="utf-8"?>
+<p:sld xmlns:a="http://schemas.openxmlformats.org/drawingml/2006/main" xmlns:r="http://schemas.openxmlformats.org/officeDocument/2006/relationships" xmlns:p="http://schemas.openxmlformats.org/presentationml/2006/main">
+  <p:cSld name="Slide 8">
     <p:bg>
       <p:bgPr>
         <a:solidFill>
@@ -6254,7 +8023,7 @@
                 <a:ea typeface="Calibri" pitchFamily="34" charset="-122"/>
                 <a:cs typeface="Calibri" pitchFamily="34" charset="-120"/>
               </a:rPr>
-              <a:t>P2D 프로토 버전 (문헌값 기반)</a:t>
+              <a:t>P2D 프로토 버전 (문헌값 기반) · 자체 물성 확보 후 고도화</a:t>
             </a:r>
             <a:endParaRPr lang="en-US" sz="1500" dirty="0"/>
           </a:p>
